--- a/docs/reports/pllsim-项目总结-v0.9.3.pptx
+++ b/docs/reports/pllsim-项目总结-v0.9.3.pptx
@@ -1708,7 +1708,7 @@
                 <a:ea typeface="Microsoft YaHei" pitchFamily="34" charset="-122"/>
                 <a:cs typeface="Microsoft YaHei" pitchFamily="34" charset="-120"/>
               </a:rPr>
-              <a:t>v0.9.3    ·    6 种架构    ·    779 项自动化测试</a:t>
+              <a:t>v0.9.3    ·    6 种架构    ·    862 项自动化测试</a:t>
             </a:r>
             <a:endParaRPr lang="en-US" sz="1400" dirty="0"/>
           </a:p>
@@ -2737,7 +2737,7 @@
                 <a:ea typeface="Microsoft YaHei" pitchFamily="34" charset="-122"/>
                 <a:cs typeface="Microsoft YaHei" pitchFamily="34" charset="-120"/>
               </a:rPr>
-              <a:t>779</a:t>
+              <a:t>862</a:t>
             </a:r>
             <a:endParaRPr lang="en-US" sz="3400" dirty="0"/>
           </a:p>
@@ -4360,7 +4360,7 @@
                           <a:ea typeface="Microsoft YaHei" pitchFamily="34" charset="-122"/>
                           <a:cs typeface="Microsoft YaHei" pitchFamily="34" charset="-120"/>
                         </a:rPr>
-                        <a:t>58.9</a:t>
+                        <a:t>59.3</a:t>
                       </a:r>
                       <a:endParaRPr lang="en-US" sz="1250" dirty="0">
                         <a:latin typeface="Microsoft YaHei" charset="0"/>
@@ -4428,7 +4428,7 @@
                           <a:ea typeface="Microsoft YaHei" pitchFamily="34" charset="-122"/>
                           <a:cs typeface="Microsoft YaHei" pitchFamily="34" charset="-120"/>
                         </a:rPr>
-                        <a:t>77</a:t>
+                        <a:t>76</a:t>
                       </a:r>
                       <a:endParaRPr lang="en-US" sz="1250" dirty="0">
                         <a:latin typeface="Microsoft YaHei" charset="0"/>
@@ -7229,7 +7229,7 @@
                 <a:ea typeface="Microsoft YaHei" pitchFamily="34" charset="-122"/>
                 <a:cs typeface="Microsoft YaHei" pitchFamily="34" charset="-120"/>
               </a:rPr>
-              <a:t>779 项自动化测试，每次代码提交在两个 Python 版本上全量运行</a:t>
+              <a:t>862 项自动化测试，每次代码提交在两个 Python 版本上全量运行</a:t>
             </a:r>
             <a:endParaRPr lang="en-US" sz="1400" dirty="0"/>
           </a:p>

--- a/docs/reports/pllsim-项目总结-v0.9.3.pptx
+++ b/docs/reports/pllsim-项目总结-v0.9.3.pptx
@@ -1708,7 +1708,7 @@
                 <a:ea typeface="Microsoft YaHei" pitchFamily="34" charset="-122"/>
                 <a:cs typeface="Microsoft YaHei" pitchFamily="34" charset="-120"/>
               </a:rPr>
-              <a:t>v0.9.3    ·    6 种架构    ·    862 项自动化测试</a:t>
+              <a:t>v0.9.3    ·    6 种架构    ·    883 项自动化测试</a:t>
             </a:r>
             <a:endParaRPr lang="en-US" sz="1400" dirty="0"/>
           </a:p>
@@ -2348,7 +2348,7 @@
                 <a:ea typeface="Microsoft YaHei" pitchFamily="34" charset="-122"/>
                 <a:cs typeface="Microsoft YaHei" pitchFamily="34" charset="-120"/>
               </a:rPr>
-              <a:t>6 种架构 · 15 个预设配置 · 21 个可运行示例</a:t>
+              <a:t>6 种架构 · 18 个预设配置 · 21 个可运行示例</a:t>
             </a:r>
             <a:endParaRPr lang="en-US" sz="1400" dirty="0"/>
           </a:p>
@@ -2523,7 +2523,7 @@
                 <a:ea typeface="Microsoft YaHei" pitchFamily="34" charset="-122"/>
                 <a:cs typeface="Microsoft YaHei" pitchFamily="34" charset="-120"/>
               </a:rPr>
-              <a:t>15</a:t>
+              <a:t>18</a:t>
             </a:r>
             <a:endParaRPr lang="en-US" sz="3400" dirty="0"/>
           </a:p>
@@ -2737,7 +2737,7 @@
                 <a:ea typeface="Microsoft YaHei" pitchFamily="34" charset="-122"/>
                 <a:cs typeface="Microsoft YaHei" pitchFamily="34" charset="-120"/>
               </a:rPr>
-              <a:t>862</a:t>
+              <a:t>883</a:t>
             </a:r>
             <a:endParaRPr lang="en-US" sz="3400" dirty="0"/>
           </a:p>
@@ -3585,7 +3585,7 @@
                 <a:ea typeface="Microsoft YaHei" pitchFamily="34" charset="-122"/>
                 <a:cs typeface="Microsoft YaHei" pitchFamily="34" charset="-120"/>
               </a:rPr>
-              <a:t>凭什么可信：四篇 JSSC 论文对标</a:t>
+              <a:t>凭什么可信：七篇 JSSC 论文对标</a:t>
             </a:r>
             <a:endParaRPr lang="en-US" sz="3200" dirty="0"/>
           </a:p>
@@ -3624,7 +3624,7 @@
                 <a:ea typeface="Microsoft YaHei" pitchFamily="34" charset="-122"/>
                 <a:cs typeface="Microsoft YaHei" pitchFamily="34" charset="-120"/>
               </a:rPr>
-              <a:t>五个通道，逐条比较发表值 / 线性模型 / 时域模型的积分抖动（fs）</a:t>
+              <a:t>八个通道，六种架构各有锚点，逐条比较发表值 / 线性模型 / 时域模型的积分抖动（fs）</a:t>
             </a:r>
             <a:endParaRPr lang="en-US" sz="1400" dirty="0"/>
           </a:p>
@@ -5302,6 +5302,828 @@
                   </a:tcPr>
                 </a:tc>
               </a:tr>
+              <a:tr h="384048">
+                <a:tc>
+                  <a:txBody>
+                    <a:bodyPr/>
+                    <a:lstStyle/>
+                    <a:p>
+                      <a:pPr algn="l" indent="0" marL="0">
+                        <a:buNone/>
+                      </a:pPr>
+                      <a:r>
+                        <a:rPr lang="en-US" sz="1250" dirty="0">
+                          <a:solidFill>
+                            <a:srgbClr val="16202B"/>
+                          </a:solidFill>
+                          <a:latin typeface="Microsoft YaHei" pitchFamily="34" charset="0"/>
+                          <a:ea typeface="Microsoft YaHei" pitchFamily="34" charset="-122"/>
+                          <a:cs typeface="Microsoft YaHei" pitchFamily="34" charset="-120"/>
+                        </a:rPr>
+                        <a:t>Da Dalt'03  电荷泵 PLL  2.488 GHz  整数N（锚点 L(1M) −115 dBc/Hz）</a:t>
+                      </a:r>
+                      <a:endParaRPr lang="en-US" sz="1250" dirty="0">
+                        <a:latin typeface="Microsoft YaHei" charset="0"/>
+                        <a:ea typeface="Microsoft YaHei" charset="0"/>
+                        <a:cs typeface="Microsoft YaHei" charset="0"/>
+                      </a:endParaRPr>
+                    </a:p>
+                  </a:txBody>
+                  <a:tcPr marL="91440" marR="91440" marT="45720" marB="45720" anchor="ctr">
+                    <a:lnL w="6350" cap="flat" cmpd="sng" algn="ctr">
+                      <a:solidFill>
+                        <a:srgbClr val="D3DBE3"/>
+                      </a:solidFill>
+                      <a:prstDash val="solid"/>
+                      <a:round/>
+                      <a:headEnd type="none" w="med" len="med"/>
+                      <a:tailEnd type="none" w="med" len="med"/>
+                    </a:lnL>
+                    <a:lnR w="6350" cap="flat" cmpd="sng" algn="ctr">
+                      <a:solidFill>
+                        <a:srgbClr val="D3DBE3"/>
+                      </a:solidFill>
+                      <a:prstDash val="solid"/>
+                      <a:round/>
+                      <a:headEnd type="none" w="med" len="med"/>
+                      <a:tailEnd type="none" w="med" len="med"/>
+                    </a:lnR>
+                    <a:lnT w="6350" cap="flat" cmpd="sng" algn="ctr">
+                      <a:solidFill>
+                        <a:srgbClr val="D3DBE3"/>
+                      </a:solidFill>
+                      <a:prstDash val="solid"/>
+                      <a:round/>
+                      <a:headEnd type="none" w="med" len="med"/>
+                      <a:tailEnd type="none" w="med" len="med"/>
+                    </a:lnT>
+                    <a:lnB w="6350" cap="flat" cmpd="sng" algn="ctr">
+                      <a:solidFill>
+                        <a:srgbClr val="D3DBE3"/>
+                      </a:solidFill>
+                      <a:prstDash val="solid"/>
+                      <a:round/>
+                      <a:headEnd type="none" w="med" len="med"/>
+                      <a:tailEnd type="none" w="med" len="med"/>
+                    </a:lnB>
+                    <a:solidFill>
+                      <a:srgbClr val="FFFFFF"/>
+                    </a:solidFill>
+                  </a:tcPr>
+                </a:tc>
+                <a:tc>
+                  <a:txBody>
+                    <a:bodyPr/>
+                    <a:lstStyle/>
+                    <a:p>
+                      <a:pPr algn="ctr" indent="0" marL="0">
+                        <a:buNone/>
+                      </a:pPr>
+                      <a:r>
+                        <a:rPr lang="en-US" sz="1250" dirty="0">
+                          <a:solidFill>
+                            <a:srgbClr val="16202B"/>
+                          </a:solidFill>
+                          <a:latin typeface="Microsoft YaHei" pitchFamily="34" charset="0"/>
+                          <a:ea typeface="Microsoft YaHei" pitchFamily="34" charset="-122"/>
+                          <a:cs typeface="Microsoft YaHei" pitchFamily="34" charset="-120"/>
+                        </a:rPr>
+                        <a:t>860 (band n/a)</a:t>
+                      </a:r>
+                      <a:endParaRPr lang="en-US" sz="1250" dirty="0">
+                        <a:latin typeface="Microsoft YaHei" charset="0"/>
+                        <a:ea typeface="Microsoft YaHei" charset="0"/>
+                        <a:cs typeface="Microsoft YaHei" charset="0"/>
+                      </a:endParaRPr>
+                    </a:p>
+                  </a:txBody>
+                  <a:tcPr marL="91440" marR="91440" marT="45720" marB="45720" anchor="ctr">
+                    <a:lnL w="6350" cap="flat" cmpd="sng" algn="ctr">
+                      <a:solidFill>
+                        <a:srgbClr val="D3DBE3"/>
+                      </a:solidFill>
+                      <a:prstDash val="solid"/>
+                      <a:round/>
+                      <a:headEnd type="none" w="med" len="med"/>
+                      <a:tailEnd type="none" w="med" len="med"/>
+                    </a:lnL>
+                    <a:lnR w="6350" cap="flat" cmpd="sng" algn="ctr">
+                      <a:solidFill>
+                        <a:srgbClr val="D3DBE3"/>
+                      </a:solidFill>
+                      <a:prstDash val="solid"/>
+                      <a:round/>
+                      <a:headEnd type="none" w="med" len="med"/>
+                      <a:tailEnd type="none" w="med" len="med"/>
+                    </a:lnR>
+                    <a:lnT w="6350" cap="flat" cmpd="sng" algn="ctr">
+                      <a:solidFill>
+                        <a:srgbClr val="D3DBE3"/>
+                      </a:solidFill>
+                      <a:prstDash val="solid"/>
+                      <a:round/>
+                      <a:headEnd type="none" w="med" len="med"/>
+                      <a:tailEnd type="none" w="med" len="med"/>
+                    </a:lnT>
+                    <a:lnB w="6350" cap="flat" cmpd="sng" algn="ctr">
+                      <a:solidFill>
+                        <a:srgbClr val="D3DBE3"/>
+                      </a:solidFill>
+                      <a:prstDash val="solid"/>
+                      <a:round/>
+                      <a:headEnd type="none" w="med" len="med"/>
+                      <a:tailEnd type="none" w="med" len="med"/>
+                    </a:lnB>
+                    <a:solidFill>
+                      <a:srgbClr val="FFFFFF"/>
+                    </a:solidFill>
+                  </a:tcPr>
+                </a:tc>
+                <a:tc>
+                  <a:txBody>
+                    <a:bodyPr/>
+                    <a:lstStyle/>
+                    <a:p>
+                      <a:pPr algn="ctr" indent="0" marL="0">
+                        <a:buNone/>
+                      </a:pPr>
+                      <a:r>
+                        <a:rPr lang="en-US" sz="1250" dirty="0">
+                          <a:solidFill>
+                            <a:srgbClr val="16202B"/>
+                          </a:solidFill>
+                          <a:latin typeface="Microsoft YaHei" pitchFamily="34" charset="0"/>
+                          <a:ea typeface="Microsoft YaHei" pitchFamily="34" charset="-122"/>
+                          <a:cs typeface="Microsoft YaHei" pitchFamily="34" charset="-120"/>
+                        </a:rPr>
+                        <a:t>257.5</a:t>
+                      </a:r>
+                      <a:endParaRPr lang="en-US" sz="1250" dirty="0">
+                        <a:latin typeface="Microsoft YaHei" charset="0"/>
+                        <a:ea typeface="Microsoft YaHei" charset="0"/>
+                        <a:cs typeface="Microsoft YaHei" charset="0"/>
+                      </a:endParaRPr>
+                    </a:p>
+                  </a:txBody>
+                  <a:tcPr marL="91440" marR="91440" marT="45720" marB="45720" anchor="ctr">
+                    <a:lnL w="6350" cap="flat" cmpd="sng" algn="ctr">
+                      <a:solidFill>
+                        <a:srgbClr val="D3DBE3"/>
+                      </a:solidFill>
+                      <a:prstDash val="solid"/>
+                      <a:round/>
+                      <a:headEnd type="none" w="med" len="med"/>
+                      <a:tailEnd type="none" w="med" len="med"/>
+                    </a:lnL>
+                    <a:lnR w="6350" cap="flat" cmpd="sng" algn="ctr">
+                      <a:solidFill>
+                        <a:srgbClr val="D3DBE3"/>
+                      </a:solidFill>
+                      <a:prstDash val="solid"/>
+                      <a:round/>
+                      <a:headEnd type="none" w="med" len="med"/>
+                      <a:tailEnd type="none" w="med" len="med"/>
+                    </a:lnR>
+                    <a:lnT w="6350" cap="flat" cmpd="sng" algn="ctr">
+                      <a:solidFill>
+                        <a:srgbClr val="D3DBE3"/>
+                      </a:solidFill>
+                      <a:prstDash val="solid"/>
+                      <a:round/>
+                      <a:headEnd type="none" w="med" len="med"/>
+                      <a:tailEnd type="none" w="med" len="med"/>
+                    </a:lnT>
+                    <a:lnB w="6350" cap="flat" cmpd="sng" algn="ctr">
+                      <a:solidFill>
+                        <a:srgbClr val="D3DBE3"/>
+                      </a:solidFill>
+                      <a:prstDash val="solid"/>
+                      <a:round/>
+                      <a:headEnd type="none" w="med" len="med"/>
+                      <a:tailEnd type="none" w="med" len="med"/>
+                    </a:lnB>
+                    <a:solidFill>
+                      <a:srgbClr val="FFFFFF"/>
+                    </a:solidFill>
+                  </a:tcPr>
+                </a:tc>
+                <a:tc>
+                  <a:txBody>
+                    <a:bodyPr/>
+                    <a:lstStyle/>
+                    <a:p>
+                      <a:pPr algn="ctr" indent="0" marL="0">
+                        <a:buNone/>
+                      </a:pPr>
+                      <a:r>
+                        <a:rPr lang="en-US" sz="1250" b="1" dirty="0">
+                          <a:solidFill>
+                            <a:srgbClr val="16202B"/>
+                          </a:solidFill>
+                          <a:latin typeface="Microsoft YaHei" pitchFamily="34" charset="0"/>
+                          <a:ea typeface="Microsoft YaHei" pitchFamily="34" charset="-122"/>
+                          <a:cs typeface="Microsoft YaHei" pitchFamily="34" charset="-120"/>
+                        </a:rPr>
+                        <a:t>244</a:t>
+                      </a:r>
+                      <a:endParaRPr lang="en-US" sz="1250" dirty="0">
+                        <a:latin typeface="Microsoft YaHei" charset="0"/>
+                        <a:ea typeface="Microsoft YaHei" charset="0"/>
+                        <a:cs typeface="Microsoft YaHei" charset="0"/>
+                      </a:endParaRPr>
+                    </a:p>
+                  </a:txBody>
+                  <a:tcPr marL="91440" marR="91440" marT="45720" marB="45720" anchor="ctr">
+                    <a:lnL w="6350" cap="flat" cmpd="sng" algn="ctr">
+                      <a:solidFill>
+                        <a:srgbClr val="D3DBE3"/>
+                      </a:solidFill>
+                      <a:prstDash val="solid"/>
+                      <a:round/>
+                      <a:headEnd type="none" w="med" len="med"/>
+                      <a:tailEnd type="none" w="med" len="med"/>
+                    </a:lnL>
+                    <a:lnR w="6350" cap="flat" cmpd="sng" algn="ctr">
+                      <a:solidFill>
+                        <a:srgbClr val="D3DBE3"/>
+                      </a:solidFill>
+                      <a:prstDash val="solid"/>
+                      <a:round/>
+                      <a:headEnd type="none" w="med" len="med"/>
+                      <a:tailEnd type="none" w="med" len="med"/>
+                    </a:lnR>
+                    <a:lnT w="6350" cap="flat" cmpd="sng" algn="ctr">
+                      <a:solidFill>
+                        <a:srgbClr val="D3DBE3"/>
+                      </a:solidFill>
+                      <a:prstDash val="solid"/>
+                      <a:round/>
+                      <a:headEnd type="none" w="med" len="med"/>
+                      <a:tailEnd type="none" w="med" len="med"/>
+                    </a:lnT>
+                    <a:lnB w="6350" cap="flat" cmpd="sng" algn="ctr">
+                      <a:solidFill>
+                        <a:srgbClr val="D3DBE3"/>
+                      </a:solidFill>
+                      <a:prstDash val="solid"/>
+                      <a:round/>
+                      <a:headEnd type="none" w="med" len="med"/>
+                      <a:tailEnd type="none" w="med" len="med"/>
+                    </a:lnB>
+                    <a:solidFill>
+                      <a:srgbClr val="FFFFFF"/>
+                    </a:solidFill>
+                  </a:tcPr>
+                </a:tc>
+              </a:tr>
+              <a:tr h="384048">
+                <a:tc>
+                  <a:txBody>
+                    <a:bodyPr/>
+                    <a:lstStyle/>
+                    <a:p>
+                      <a:pPr algn="l" indent="0" marL="0">
+                        <a:buNone/>
+                      </a:pPr>
+                      <a:r>
+                        <a:rPr lang="en-US" sz="1250" dirty="0">
+                          <a:solidFill>
+                            <a:srgbClr val="16202B"/>
+                          </a:solidFill>
+                          <a:latin typeface="Microsoft YaHei" pitchFamily="34" charset="0"/>
+                          <a:ea typeface="Microsoft YaHei" pitchFamily="34" charset="-122"/>
+                          <a:cs typeface="Microsoft YaHei" pitchFamily="34" charset="-120"/>
+                        </a:rPr>
+                        <a:t>Helal'09  注入锁定倍频器  3.2 GHz  ×64</a:t>
+                      </a:r>
+                      <a:endParaRPr lang="en-US" sz="1250" dirty="0">
+                        <a:latin typeface="Microsoft YaHei" charset="0"/>
+                        <a:ea typeface="Microsoft YaHei" charset="0"/>
+                        <a:cs typeface="Microsoft YaHei" charset="0"/>
+                      </a:endParaRPr>
+                    </a:p>
+                  </a:txBody>
+                  <a:tcPr marL="91440" marR="91440" marT="45720" marB="45720" anchor="ctr">
+                    <a:lnL w="6350" cap="flat" cmpd="sng" algn="ctr">
+                      <a:solidFill>
+                        <a:srgbClr val="D3DBE3"/>
+                      </a:solidFill>
+                      <a:prstDash val="solid"/>
+                      <a:round/>
+                      <a:headEnd type="none" w="med" len="med"/>
+                      <a:tailEnd type="none" w="med" len="med"/>
+                    </a:lnL>
+                    <a:lnR w="6350" cap="flat" cmpd="sng" algn="ctr">
+                      <a:solidFill>
+                        <a:srgbClr val="D3DBE3"/>
+                      </a:solidFill>
+                      <a:prstDash val="solid"/>
+                      <a:round/>
+                      <a:headEnd type="none" w="med" len="med"/>
+                      <a:tailEnd type="none" w="med" len="med"/>
+                    </a:lnR>
+                    <a:lnT w="6350" cap="flat" cmpd="sng" algn="ctr">
+                      <a:solidFill>
+                        <a:srgbClr val="D3DBE3"/>
+                      </a:solidFill>
+                      <a:prstDash val="solid"/>
+                      <a:round/>
+                      <a:headEnd type="none" w="med" len="med"/>
+                      <a:tailEnd type="none" w="med" len="med"/>
+                    </a:lnT>
+                    <a:lnB w="6350" cap="flat" cmpd="sng" algn="ctr">
+                      <a:solidFill>
+                        <a:srgbClr val="D3DBE3"/>
+                      </a:solidFill>
+                      <a:prstDash val="solid"/>
+                      <a:round/>
+                      <a:headEnd type="none" w="med" len="med"/>
+                      <a:tailEnd type="none" w="med" len="med"/>
+                    </a:lnB>
+                    <a:solidFill>
+                      <a:srgbClr val="E8EDF2"/>
+                    </a:solidFill>
+                  </a:tcPr>
+                </a:tc>
+                <a:tc>
+                  <a:txBody>
+                    <a:bodyPr/>
+                    <a:lstStyle/>
+                    <a:p>
+                      <a:pPr algn="ctr" indent="0" marL="0">
+                        <a:buNone/>
+                      </a:pPr>
+                      <a:r>
+                        <a:rPr lang="en-US" sz="1250" dirty="0">
+                          <a:solidFill>
+                            <a:srgbClr val="16202B"/>
+                          </a:solidFill>
+                          <a:latin typeface="Microsoft YaHei" pitchFamily="34" charset="0"/>
+                          <a:ea typeface="Microsoft YaHei" pitchFamily="34" charset="-122"/>
+                          <a:cs typeface="Microsoft YaHei" pitchFamily="34" charset="-120"/>
+                        </a:rPr>
+                        <a:t>130</a:t>
+                      </a:r>
+                      <a:endParaRPr lang="en-US" sz="1250" dirty="0">
+                        <a:latin typeface="Microsoft YaHei" charset="0"/>
+                        <a:ea typeface="Microsoft YaHei" charset="0"/>
+                        <a:cs typeface="Microsoft YaHei" charset="0"/>
+                      </a:endParaRPr>
+                    </a:p>
+                  </a:txBody>
+                  <a:tcPr marL="91440" marR="91440" marT="45720" marB="45720" anchor="ctr">
+                    <a:lnL w="6350" cap="flat" cmpd="sng" algn="ctr">
+                      <a:solidFill>
+                        <a:srgbClr val="D3DBE3"/>
+                      </a:solidFill>
+                      <a:prstDash val="solid"/>
+                      <a:round/>
+                      <a:headEnd type="none" w="med" len="med"/>
+                      <a:tailEnd type="none" w="med" len="med"/>
+                    </a:lnL>
+                    <a:lnR w="6350" cap="flat" cmpd="sng" algn="ctr">
+                      <a:solidFill>
+                        <a:srgbClr val="D3DBE3"/>
+                      </a:solidFill>
+                      <a:prstDash val="solid"/>
+                      <a:round/>
+                      <a:headEnd type="none" w="med" len="med"/>
+                      <a:tailEnd type="none" w="med" len="med"/>
+                    </a:lnR>
+                    <a:lnT w="6350" cap="flat" cmpd="sng" algn="ctr">
+                      <a:solidFill>
+                        <a:srgbClr val="D3DBE3"/>
+                      </a:solidFill>
+                      <a:prstDash val="solid"/>
+                      <a:round/>
+                      <a:headEnd type="none" w="med" len="med"/>
+                      <a:tailEnd type="none" w="med" len="med"/>
+                    </a:lnT>
+                    <a:lnB w="6350" cap="flat" cmpd="sng" algn="ctr">
+                      <a:solidFill>
+                        <a:srgbClr val="D3DBE3"/>
+                      </a:solidFill>
+                      <a:prstDash val="solid"/>
+                      <a:round/>
+                      <a:headEnd type="none" w="med" len="med"/>
+                      <a:tailEnd type="none" w="med" len="med"/>
+                    </a:lnB>
+                    <a:solidFill>
+                      <a:srgbClr val="E8EDF2"/>
+                    </a:solidFill>
+                  </a:tcPr>
+                </a:tc>
+                <a:tc>
+                  <a:txBody>
+                    <a:bodyPr/>
+                    <a:lstStyle/>
+                    <a:p>
+                      <a:pPr algn="ctr" indent="0" marL="0">
+                        <a:buNone/>
+                      </a:pPr>
+                      <a:r>
+                        <a:rPr lang="en-US" sz="1250" dirty="0">
+                          <a:solidFill>
+                            <a:srgbClr val="16202B"/>
+                          </a:solidFill>
+                          <a:latin typeface="Microsoft YaHei" pitchFamily="34" charset="0"/>
+                          <a:ea typeface="Microsoft YaHei" pitchFamily="34" charset="-122"/>
+                          <a:cs typeface="Microsoft YaHei" pitchFamily="34" charset="-120"/>
+                        </a:rPr>
+                        <a:t>83</a:t>
+                      </a:r>
+                      <a:endParaRPr lang="en-US" sz="1250" dirty="0">
+                        <a:latin typeface="Microsoft YaHei" charset="0"/>
+                        <a:ea typeface="Microsoft YaHei" charset="0"/>
+                        <a:cs typeface="Microsoft YaHei" charset="0"/>
+                      </a:endParaRPr>
+                    </a:p>
+                  </a:txBody>
+                  <a:tcPr marL="91440" marR="91440" marT="45720" marB="45720" anchor="ctr">
+                    <a:lnL w="6350" cap="flat" cmpd="sng" algn="ctr">
+                      <a:solidFill>
+                        <a:srgbClr val="D3DBE3"/>
+                      </a:solidFill>
+                      <a:prstDash val="solid"/>
+                      <a:round/>
+                      <a:headEnd type="none" w="med" len="med"/>
+                      <a:tailEnd type="none" w="med" len="med"/>
+                    </a:lnL>
+                    <a:lnR w="6350" cap="flat" cmpd="sng" algn="ctr">
+                      <a:solidFill>
+                        <a:srgbClr val="D3DBE3"/>
+                      </a:solidFill>
+                      <a:prstDash val="solid"/>
+                      <a:round/>
+                      <a:headEnd type="none" w="med" len="med"/>
+                      <a:tailEnd type="none" w="med" len="med"/>
+                    </a:lnR>
+                    <a:lnT w="6350" cap="flat" cmpd="sng" algn="ctr">
+                      <a:solidFill>
+                        <a:srgbClr val="D3DBE3"/>
+                      </a:solidFill>
+                      <a:prstDash val="solid"/>
+                      <a:round/>
+                      <a:headEnd type="none" w="med" len="med"/>
+                      <a:tailEnd type="none" w="med" len="med"/>
+                    </a:lnT>
+                    <a:lnB w="6350" cap="flat" cmpd="sng" algn="ctr">
+                      <a:solidFill>
+                        <a:srgbClr val="D3DBE3"/>
+                      </a:solidFill>
+                      <a:prstDash val="solid"/>
+                      <a:round/>
+                      <a:headEnd type="none" w="med" len="med"/>
+                      <a:tailEnd type="none" w="med" len="med"/>
+                    </a:lnB>
+                    <a:solidFill>
+                      <a:srgbClr val="E8EDF2"/>
+                    </a:solidFill>
+                  </a:tcPr>
+                </a:tc>
+                <a:tc>
+                  <a:txBody>
+                    <a:bodyPr/>
+                    <a:lstStyle/>
+                    <a:p>
+                      <a:pPr algn="ctr" indent="0" marL="0">
+                        <a:buNone/>
+                      </a:pPr>
+                      <a:r>
+                        <a:rPr lang="en-US" sz="1250" b="1" dirty="0">
+                          <a:solidFill>
+                            <a:srgbClr val="16202B"/>
+                          </a:solidFill>
+                          <a:latin typeface="Microsoft YaHei" pitchFamily="34" charset="0"/>
+                          <a:ea typeface="Microsoft YaHei" pitchFamily="34" charset="-122"/>
+                          <a:cs typeface="Microsoft YaHei" pitchFamily="34" charset="-120"/>
+                        </a:rPr>
+                        <a:t>130</a:t>
+                      </a:r>
+                      <a:endParaRPr lang="en-US" sz="1250" dirty="0">
+                        <a:latin typeface="Microsoft YaHei" charset="0"/>
+                        <a:ea typeface="Microsoft YaHei" charset="0"/>
+                        <a:cs typeface="Microsoft YaHei" charset="0"/>
+                      </a:endParaRPr>
+                    </a:p>
+                  </a:txBody>
+                  <a:tcPr marL="91440" marR="91440" marT="45720" marB="45720" anchor="ctr">
+                    <a:lnL w="6350" cap="flat" cmpd="sng" algn="ctr">
+                      <a:solidFill>
+                        <a:srgbClr val="D3DBE3"/>
+                      </a:solidFill>
+                      <a:prstDash val="solid"/>
+                      <a:round/>
+                      <a:headEnd type="none" w="med" len="med"/>
+                      <a:tailEnd type="none" w="med" len="med"/>
+                    </a:lnL>
+                    <a:lnR w="6350" cap="flat" cmpd="sng" algn="ctr">
+                      <a:solidFill>
+                        <a:srgbClr val="D3DBE3"/>
+                      </a:solidFill>
+                      <a:prstDash val="solid"/>
+                      <a:round/>
+                      <a:headEnd type="none" w="med" len="med"/>
+                      <a:tailEnd type="none" w="med" len="med"/>
+                    </a:lnR>
+                    <a:lnT w="6350" cap="flat" cmpd="sng" algn="ctr">
+                      <a:solidFill>
+                        <a:srgbClr val="D3DBE3"/>
+                      </a:solidFill>
+                      <a:prstDash val="solid"/>
+                      <a:round/>
+                      <a:headEnd type="none" w="med" len="med"/>
+                      <a:tailEnd type="none" w="med" len="med"/>
+                    </a:lnT>
+                    <a:lnB w="6350" cap="flat" cmpd="sng" algn="ctr">
+                      <a:solidFill>
+                        <a:srgbClr val="D3DBE3"/>
+                      </a:solidFill>
+                      <a:prstDash val="solid"/>
+                      <a:round/>
+                      <a:headEnd type="none" w="med" len="med"/>
+                      <a:tailEnd type="none" w="med" len="med"/>
+                    </a:lnB>
+                    <a:solidFill>
+                      <a:srgbClr val="E8EDF2"/>
+                    </a:solidFill>
+                  </a:tcPr>
+                </a:tc>
+              </a:tr>
+              <a:tr h="384048">
+                <a:tc>
+                  <a:txBody>
+                    <a:bodyPr/>
+                    <a:lstStyle/>
+                    <a:p>
+                      <a:pPr algn="l" indent="0" marL="0">
+                        <a:buNone/>
+                      </a:pPr>
+                      <a:r>
+                        <a:rPr lang="en-US" sz="1250" dirty="0">
+                          <a:solidFill>
+                            <a:srgbClr val="16202B"/>
+                          </a:solidFill>
+                          <a:latin typeface="Microsoft YaHei" pitchFamily="34" charset="0"/>
+                          <a:ea typeface="Microsoft YaHei" pitchFamily="34" charset="-122"/>
+                          <a:cs typeface="Microsoft YaHei" pitchFamily="34" charset="-120"/>
+                        </a:rPr>
+                        <a:t>Elshazly'13  数字 MDLL  1.5 GHz  ×4</a:t>
+                      </a:r>
+                      <a:endParaRPr lang="en-US" sz="1250" dirty="0">
+                        <a:latin typeface="Microsoft YaHei" charset="0"/>
+                        <a:ea typeface="Microsoft YaHei" charset="0"/>
+                        <a:cs typeface="Microsoft YaHei" charset="0"/>
+                      </a:endParaRPr>
+                    </a:p>
+                  </a:txBody>
+                  <a:tcPr marL="91440" marR="91440" marT="45720" marB="45720" anchor="ctr">
+                    <a:lnL w="6350" cap="flat" cmpd="sng" algn="ctr">
+                      <a:solidFill>
+                        <a:srgbClr val="D3DBE3"/>
+                      </a:solidFill>
+                      <a:prstDash val="solid"/>
+                      <a:round/>
+                      <a:headEnd type="none" w="med" len="med"/>
+                      <a:tailEnd type="none" w="med" len="med"/>
+                    </a:lnL>
+                    <a:lnR w="6350" cap="flat" cmpd="sng" algn="ctr">
+                      <a:solidFill>
+                        <a:srgbClr val="D3DBE3"/>
+                      </a:solidFill>
+                      <a:prstDash val="solid"/>
+                      <a:round/>
+                      <a:headEnd type="none" w="med" len="med"/>
+                      <a:tailEnd type="none" w="med" len="med"/>
+                    </a:lnR>
+                    <a:lnT w="6350" cap="flat" cmpd="sng" algn="ctr">
+                      <a:solidFill>
+                        <a:srgbClr val="D3DBE3"/>
+                      </a:solidFill>
+                      <a:prstDash val="solid"/>
+                      <a:round/>
+                      <a:headEnd type="none" w="med" len="med"/>
+                      <a:tailEnd type="none" w="med" len="med"/>
+                    </a:lnT>
+                    <a:lnB w="6350" cap="flat" cmpd="sng" algn="ctr">
+                      <a:solidFill>
+                        <a:srgbClr val="D3DBE3"/>
+                      </a:solidFill>
+                      <a:prstDash val="solid"/>
+                      <a:round/>
+                      <a:headEnd type="none" w="med" len="med"/>
+                      <a:tailEnd type="none" w="med" len="med"/>
+                    </a:lnB>
+                    <a:solidFill>
+                      <a:srgbClr val="FFFFFF"/>
+                    </a:solidFill>
+                  </a:tcPr>
+                </a:tc>
+                <a:tc>
+                  <a:txBody>
+                    <a:bodyPr/>
+                    <a:lstStyle/>
+                    <a:p>
+                      <a:pPr algn="ctr" indent="0" marL="0">
+                        <a:buNone/>
+                      </a:pPr>
+                      <a:r>
+                        <a:rPr lang="en-US" sz="1250" dirty="0">
+                          <a:solidFill>
+                            <a:srgbClr val="16202B"/>
+                          </a:solidFill>
+                          <a:latin typeface="Microsoft YaHei" pitchFamily="34" charset="0"/>
+                          <a:ea typeface="Microsoft YaHei" pitchFamily="34" charset="-122"/>
+                          <a:cs typeface="Microsoft YaHei" pitchFamily="34" charset="-120"/>
+                        </a:rPr>
+                        <a:t>400</a:t>
+                      </a:r>
+                      <a:endParaRPr lang="en-US" sz="1250" dirty="0">
+                        <a:latin typeface="Microsoft YaHei" charset="0"/>
+                        <a:ea typeface="Microsoft YaHei" charset="0"/>
+                        <a:cs typeface="Microsoft YaHei" charset="0"/>
+                      </a:endParaRPr>
+                    </a:p>
+                  </a:txBody>
+                  <a:tcPr marL="91440" marR="91440" marT="45720" marB="45720" anchor="ctr">
+                    <a:lnL w="6350" cap="flat" cmpd="sng" algn="ctr">
+                      <a:solidFill>
+                        <a:srgbClr val="D3DBE3"/>
+                      </a:solidFill>
+                      <a:prstDash val="solid"/>
+                      <a:round/>
+                      <a:headEnd type="none" w="med" len="med"/>
+                      <a:tailEnd type="none" w="med" len="med"/>
+                    </a:lnL>
+                    <a:lnR w="6350" cap="flat" cmpd="sng" algn="ctr">
+                      <a:solidFill>
+                        <a:srgbClr val="D3DBE3"/>
+                      </a:solidFill>
+                      <a:prstDash val="solid"/>
+                      <a:round/>
+                      <a:headEnd type="none" w="med" len="med"/>
+                      <a:tailEnd type="none" w="med" len="med"/>
+                    </a:lnR>
+                    <a:lnT w="6350" cap="flat" cmpd="sng" algn="ctr">
+                      <a:solidFill>
+                        <a:srgbClr val="D3DBE3"/>
+                      </a:solidFill>
+                      <a:prstDash val="solid"/>
+                      <a:round/>
+                      <a:headEnd type="none" w="med" len="med"/>
+                      <a:tailEnd type="none" w="med" len="med"/>
+                    </a:lnT>
+                    <a:lnB w="6350" cap="flat" cmpd="sng" algn="ctr">
+                      <a:solidFill>
+                        <a:srgbClr val="D3DBE3"/>
+                      </a:solidFill>
+                      <a:prstDash val="solid"/>
+                      <a:round/>
+                      <a:headEnd type="none" w="med" len="med"/>
+                      <a:tailEnd type="none" w="med" len="med"/>
+                    </a:lnB>
+                    <a:solidFill>
+                      <a:srgbClr val="FFFFFF"/>
+                    </a:solidFill>
+                  </a:tcPr>
+                </a:tc>
+                <a:tc>
+                  <a:txBody>
+                    <a:bodyPr/>
+                    <a:lstStyle/>
+                    <a:p>
+                      <a:pPr algn="ctr" indent="0" marL="0">
+                        <a:buNone/>
+                      </a:pPr>
+                      <a:r>
+                        <a:rPr lang="en-US" sz="1250" dirty="0">
+                          <a:solidFill>
+                            <a:srgbClr val="16202B"/>
+                          </a:solidFill>
+                          <a:latin typeface="Microsoft YaHei" pitchFamily="34" charset="0"/>
+                          <a:ea typeface="Microsoft YaHei" pitchFamily="34" charset="-122"/>
+                          <a:cs typeface="Microsoft YaHei" pitchFamily="34" charset="-120"/>
+                        </a:rPr>
+                        <a:t>541.4</a:t>
+                      </a:r>
+                      <a:endParaRPr lang="en-US" sz="1250" dirty="0">
+                        <a:latin typeface="Microsoft YaHei" charset="0"/>
+                        <a:ea typeface="Microsoft YaHei" charset="0"/>
+                        <a:cs typeface="Microsoft YaHei" charset="0"/>
+                      </a:endParaRPr>
+                    </a:p>
+                  </a:txBody>
+                  <a:tcPr marL="91440" marR="91440" marT="45720" marB="45720" anchor="ctr">
+                    <a:lnL w="6350" cap="flat" cmpd="sng" algn="ctr">
+                      <a:solidFill>
+                        <a:srgbClr val="D3DBE3"/>
+                      </a:solidFill>
+                      <a:prstDash val="solid"/>
+                      <a:round/>
+                      <a:headEnd type="none" w="med" len="med"/>
+                      <a:tailEnd type="none" w="med" len="med"/>
+                    </a:lnL>
+                    <a:lnR w="6350" cap="flat" cmpd="sng" algn="ctr">
+                      <a:solidFill>
+                        <a:srgbClr val="D3DBE3"/>
+                      </a:solidFill>
+                      <a:prstDash val="solid"/>
+                      <a:round/>
+                      <a:headEnd type="none" w="med" len="med"/>
+                      <a:tailEnd type="none" w="med" len="med"/>
+                    </a:lnR>
+                    <a:lnT w="6350" cap="flat" cmpd="sng" algn="ctr">
+                      <a:solidFill>
+                        <a:srgbClr val="D3DBE3"/>
+                      </a:solidFill>
+                      <a:prstDash val="solid"/>
+                      <a:round/>
+                      <a:headEnd type="none" w="med" len="med"/>
+                      <a:tailEnd type="none" w="med" len="med"/>
+                    </a:lnT>
+                    <a:lnB w="6350" cap="flat" cmpd="sng" algn="ctr">
+                      <a:solidFill>
+                        <a:srgbClr val="D3DBE3"/>
+                      </a:solidFill>
+                      <a:prstDash val="solid"/>
+                      <a:round/>
+                      <a:headEnd type="none" w="med" len="med"/>
+                      <a:tailEnd type="none" w="med" len="med"/>
+                    </a:lnB>
+                    <a:solidFill>
+                      <a:srgbClr val="FFFFFF"/>
+                    </a:solidFill>
+                  </a:tcPr>
+                </a:tc>
+                <a:tc>
+                  <a:txBody>
+                    <a:bodyPr/>
+                    <a:lstStyle/>
+                    <a:p>
+                      <a:pPr algn="ctr" indent="0" marL="0">
+                        <a:buNone/>
+                      </a:pPr>
+                      <a:r>
+                        <a:rPr lang="en-US" sz="1250" b="1" dirty="0">
+                          <a:solidFill>
+                            <a:srgbClr val="16202B"/>
+                          </a:solidFill>
+                          <a:latin typeface="Microsoft YaHei" pitchFamily="34" charset="0"/>
+                          <a:ea typeface="Microsoft YaHei" pitchFamily="34" charset="-122"/>
+                          <a:cs typeface="Microsoft YaHei" pitchFamily="34" charset="-120"/>
+                        </a:rPr>
+                        <a:t>415</a:t>
+                      </a:r>
+                      <a:endParaRPr lang="en-US" sz="1250" dirty="0">
+                        <a:latin typeface="Microsoft YaHei" charset="0"/>
+                        <a:ea typeface="Microsoft YaHei" charset="0"/>
+                        <a:cs typeface="Microsoft YaHei" charset="0"/>
+                      </a:endParaRPr>
+                    </a:p>
+                  </a:txBody>
+                  <a:tcPr marL="91440" marR="91440" marT="45720" marB="45720" anchor="ctr">
+                    <a:lnL w="6350" cap="flat" cmpd="sng" algn="ctr">
+                      <a:solidFill>
+                        <a:srgbClr val="D3DBE3"/>
+                      </a:solidFill>
+                      <a:prstDash val="solid"/>
+                      <a:round/>
+                      <a:headEnd type="none" w="med" len="med"/>
+                      <a:tailEnd type="none" w="med" len="med"/>
+                    </a:lnL>
+                    <a:lnR w="6350" cap="flat" cmpd="sng" algn="ctr">
+                      <a:solidFill>
+                        <a:srgbClr val="D3DBE3"/>
+                      </a:solidFill>
+                      <a:prstDash val="solid"/>
+                      <a:round/>
+                      <a:headEnd type="none" w="med" len="med"/>
+                      <a:tailEnd type="none" w="med" len="med"/>
+                    </a:lnR>
+                    <a:lnT w="6350" cap="flat" cmpd="sng" algn="ctr">
+                      <a:solidFill>
+                        <a:srgbClr val="D3DBE3"/>
+                      </a:solidFill>
+                      <a:prstDash val="solid"/>
+                      <a:round/>
+                      <a:headEnd type="none" w="med" len="med"/>
+                      <a:tailEnd type="none" w="med" len="med"/>
+                    </a:lnT>
+                    <a:lnB w="6350" cap="flat" cmpd="sng" algn="ctr">
+                      <a:solidFill>
+                        <a:srgbClr val="D3DBE3"/>
+                      </a:solidFill>
+                      <a:prstDash val="solid"/>
+                      <a:round/>
+                      <a:headEnd type="none" w="med" len="med"/>
+                      <a:tailEnd type="none" w="med" len="med"/>
+                    </a:lnB>
+                    <a:solidFill>
+                      <a:srgbClr val="FFFFFF"/>
+                    </a:solidFill>
+                  </a:tcPr>
+                </a:tc>
+              </a:tr>
             </a:tbl>
           </a:graphicData>
         </a:graphic>
@@ -7229,7 +8051,7 @@
                 <a:ea typeface="Microsoft YaHei" pitchFamily="34" charset="-122"/>
                 <a:cs typeface="Microsoft YaHei" pitchFamily="34" charset="-120"/>
               </a:rPr>
-              <a:t>862 项自动化测试，每次代码提交在两个 Python 版本上全量运行</a:t>
+              <a:t>883 项自动化测试，每次代码提交在两个 Python 版本上全量运行</a:t>
             </a:r>
             <a:endParaRPr lang="en-US" sz="1400" dirty="0"/>
           </a:p>

--- a/docs/reports/pllsim-项目总结-v0.9.3.pptx
+++ b/docs/reports/pllsim-项目总结-v0.9.3.pptx
@@ -1708,7 +1708,7 @@
                 <a:ea typeface="Microsoft YaHei" pitchFamily="34" charset="-122"/>
                 <a:cs typeface="Microsoft YaHei" pitchFamily="34" charset="-120"/>
               </a:rPr>
-              <a:t>v0.9.3    ·    6 种架构    ·    779 项自动化测试</a:t>
+              <a:t>v0.9.3    ·    6 种架构    ·    883 项自动化测试</a:t>
             </a:r>
             <a:endParaRPr lang="en-US" sz="1400" dirty="0"/>
           </a:p>
@@ -2348,7 +2348,7 @@
                 <a:ea typeface="Microsoft YaHei" pitchFamily="34" charset="-122"/>
                 <a:cs typeface="Microsoft YaHei" pitchFamily="34" charset="-120"/>
               </a:rPr>
-              <a:t>6 种架构 · 15 个预设配置 · 21 个可运行示例</a:t>
+              <a:t>6 种架构 · 18 个预设配置 · 21 个可运行示例</a:t>
             </a:r>
             <a:endParaRPr lang="en-US" sz="1400" dirty="0"/>
           </a:p>
@@ -2523,7 +2523,7 @@
                 <a:ea typeface="Microsoft YaHei" pitchFamily="34" charset="-122"/>
                 <a:cs typeface="Microsoft YaHei" pitchFamily="34" charset="-120"/>
               </a:rPr>
-              <a:t>15</a:t>
+              <a:t>18</a:t>
             </a:r>
             <a:endParaRPr lang="en-US" sz="3400" dirty="0"/>
           </a:p>
@@ -2737,7 +2737,7 @@
                 <a:ea typeface="Microsoft YaHei" pitchFamily="34" charset="-122"/>
                 <a:cs typeface="Microsoft YaHei" pitchFamily="34" charset="-120"/>
               </a:rPr>
-              <a:t>779</a:t>
+              <a:t>883</a:t>
             </a:r>
             <a:endParaRPr lang="en-US" sz="3400" dirty="0"/>
           </a:p>
@@ -3585,7 +3585,7 @@
                 <a:ea typeface="Microsoft YaHei" pitchFamily="34" charset="-122"/>
                 <a:cs typeface="Microsoft YaHei" pitchFamily="34" charset="-120"/>
               </a:rPr>
-              <a:t>凭什么可信：四篇 JSSC 论文对标</a:t>
+              <a:t>凭什么可信：七篇 JSSC 论文对标</a:t>
             </a:r>
             <a:endParaRPr lang="en-US" sz="3200" dirty="0"/>
           </a:p>
@@ -3624,7 +3624,7 @@
                 <a:ea typeface="Microsoft YaHei" pitchFamily="34" charset="-122"/>
                 <a:cs typeface="Microsoft YaHei" pitchFamily="34" charset="-120"/>
               </a:rPr>
-              <a:t>五个通道，逐条比较发表值 / 线性模型 / 时域模型的积分抖动（fs）</a:t>
+              <a:t>八个通道，六种架构各有锚点，逐条比较发表值 / 线性模型 / 时域模型的积分抖动（fs）</a:t>
             </a:r>
             <a:endParaRPr lang="en-US" sz="1400" dirty="0"/>
           </a:p>
@@ -4360,7 +4360,7 @@
                           <a:ea typeface="Microsoft YaHei" pitchFamily="34" charset="-122"/>
                           <a:cs typeface="Microsoft YaHei" pitchFamily="34" charset="-120"/>
                         </a:rPr>
-                        <a:t>58.9</a:t>
+                        <a:t>59.3</a:t>
                       </a:r>
                       <a:endParaRPr lang="en-US" sz="1250" dirty="0">
                         <a:latin typeface="Microsoft YaHei" charset="0"/>
@@ -4428,7 +4428,7 @@
                           <a:ea typeface="Microsoft YaHei" pitchFamily="34" charset="-122"/>
                           <a:cs typeface="Microsoft YaHei" pitchFamily="34" charset="-120"/>
                         </a:rPr>
-                        <a:t>77</a:t>
+                        <a:t>76</a:t>
                       </a:r>
                       <a:endParaRPr lang="en-US" sz="1250" dirty="0">
                         <a:latin typeface="Microsoft YaHei" charset="0"/>
@@ -5302,6 +5302,828 @@
                   </a:tcPr>
                 </a:tc>
               </a:tr>
+              <a:tr h="384048">
+                <a:tc>
+                  <a:txBody>
+                    <a:bodyPr/>
+                    <a:lstStyle/>
+                    <a:p>
+                      <a:pPr algn="l" indent="0" marL="0">
+                        <a:buNone/>
+                      </a:pPr>
+                      <a:r>
+                        <a:rPr lang="en-US" sz="1250" dirty="0">
+                          <a:solidFill>
+                            <a:srgbClr val="16202B"/>
+                          </a:solidFill>
+                          <a:latin typeface="Microsoft YaHei" pitchFamily="34" charset="0"/>
+                          <a:ea typeface="Microsoft YaHei" pitchFamily="34" charset="-122"/>
+                          <a:cs typeface="Microsoft YaHei" pitchFamily="34" charset="-120"/>
+                        </a:rPr>
+                        <a:t>Da Dalt'03  电荷泵 PLL  2.488 GHz  整数N（锚点 L(1M) −115 dBc/Hz）</a:t>
+                      </a:r>
+                      <a:endParaRPr lang="en-US" sz="1250" dirty="0">
+                        <a:latin typeface="Microsoft YaHei" charset="0"/>
+                        <a:ea typeface="Microsoft YaHei" charset="0"/>
+                        <a:cs typeface="Microsoft YaHei" charset="0"/>
+                      </a:endParaRPr>
+                    </a:p>
+                  </a:txBody>
+                  <a:tcPr marL="91440" marR="91440" marT="45720" marB="45720" anchor="ctr">
+                    <a:lnL w="6350" cap="flat" cmpd="sng" algn="ctr">
+                      <a:solidFill>
+                        <a:srgbClr val="D3DBE3"/>
+                      </a:solidFill>
+                      <a:prstDash val="solid"/>
+                      <a:round/>
+                      <a:headEnd type="none" w="med" len="med"/>
+                      <a:tailEnd type="none" w="med" len="med"/>
+                    </a:lnL>
+                    <a:lnR w="6350" cap="flat" cmpd="sng" algn="ctr">
+                      <a:solidFill>
+                        <a:srgbClr val="D3DBE3"/>
+                      </a:solidFill>
+                      <a:prstDash val="solid"/>
+                      <a:round/>
+                      <a:headEnd type="none" w="med" len="med"/>
+                      <a:tailEnd type="none" w="med" len="med"/>
+                    </a:lnR>
+                    <a:lnT w="6350" cap="flat" cmpd="sng" algn="ctr">
+                      <a:solidFill>
+                        <a:srgbClr val="D3DBE3"/>
+                      </a:solidFill>
+                      <a:prstDash val="solid"/>
+                      <a:round/>
+                      <a:headEnd type="none" w="med" len="med"/>
+                      <a:tailEnd type="none" w="med" len="med"/>
+                    </a:lnT>
+                    <a:lnB w="6350" cap="flat" cmpd="sng" algn="ctr">
+                      <a:solidFill>
+                        <a:srgbClr val="D3DBE3"/>
+                      </a:solidFill>
+                      <a:prstDash val="solid"/>
+                      <a:round/>
+                      <a:headEnd type="none" w="med" len="med"/>
+                      <a:tailEnd type="none" w="med" len="med"/>
+                    </a:lnB>
+                    <a:solidFill>
+                      <a:srgbClr val="FFFFFF"/>
+                    </a:solidFill>
+                  </a:tcPr>
+                </a:tc>
+                <a:tc>
+                  <a:txBody>
+                    <a:bodyPr/>
+                    <a:lstStyle/>
+                    <a:p>
+                      <a:pPr algn="ctr" indent="0" marL="0">
+                        <a:buNone/>
+                      </a:pPr>
+                      <a:r>
+                        <a:rPr lang="en-US" sz="1250" dirty="0">
+                          <a:solidFill>
+                            <a:srgbClr val="16202B"/>
+                          </a:solidFill>
+                          <a:latin typeface="Microsoft YaHei" pitchFamily="34" charset="0"/>
+                          <a:ea typeface="Microsoft YaHei" pitchFamily="34" charset="-122"/>
+                          <a:cs typeface="Microsoft YaHei" pitchFamily="34" charset="-120"/>
+                        </a:rPr>
+                        <a:t>860 (band n/a)</a:t>
+                      </a:r>
+                      <a:endParaRPr lang="en-US" sz="1250" dirty="0">
+                        <a:latin typeface="Microsoft YaHei" charset="0"/>
+                        <a:ea typeface="Microsoft YaHei" charset="0"/>
+                        <a:cs typeface="Microsoft YaHei" charset="0"/>
+                      </a:endParaRPr>
+                    </a:p>
+                  </a:txBody>
+                  <a:tcPr marL="91440" marR="91440" marT="45720" marB="45720" anchor="ctr">
+                    <a:lnL w="6350" cap="flat" cmpd="sng" algn="ctr">
+                      <a:solidFill>
+                        <a:srgbClr val="D3DBE3"/>
+                      </a:solidFill>
+                      <a:prstDash val="solid"/>
+                      <a:round/>
+                      <a:headEnd type="none" w="med" len="med"/>
+                      <a:tailEnd type="none" w="med" len="med"/>
+                    </a:lnL>
+                    <a:lnR w="6350" cap="flat" cmpd="sng" algn="ctr">
+                      <a:solidFill>
+                        <a:srgbClr val="D3DBE3"/>
+                      </a:solidFill>
+                      <a:prstDash val="solid"/>
+                      <a:round/>
+                      <a:headEnd type="none" w="med" len="med"/>
+                      <a:tailEnd type="none" w="med" len="med"/>
+                    </a:lnR>
+                    <a:lnT w="6350" cap="flat" cmpd="sng" algn="ctr">
+                      <a:solidFill>
+                        <a:srgbClr val="D3DBE3"/>
+                      </a:solidFill>
+                      <a:prstDash val="solid"/>
+                      <a:round/>
+                      <a:headEnd type="none" w="med" len="med"/>
+                      <a:tailEnd type="none" w="med" len="med"/>
+                    </a:lnT>
+                    <a:lnB w="6350" cap="flat" cmpd="sng" algn="ctr">
+                      <a:solidFill>
+                        <a:srgbClr val="D3DBE3"/>
+                      </a:solidFill>
+                      <a:prstDash val="solid"/>
+                      <a:round/>
+                      <a:headEnd type="none" w="med" len="med"/>
+                      <a:tailEnd type="none" w="med" len="med"/>
+                    </a:lnB>
+                    <a:solidFill>
+                      <a:srgbClr val="FFFFFF"/>
+                    </a:solidFill>
+                  </a:tcPr>
+                </a:tc>
+                <a:tc>
+                  <a:txBody>
+                    <a:bodyPr/>
+                    <a:lstStyle/>
+                    <a:p>
+                      <a:pPr algn="ctr" indent="0" marL="0">
+                        <a:buNone/>
+                      </a:pPr>
+                      <a:r>
+                        <a:rPr lang="en-US" sz="1250" dirty="0">
+                          <a:solidFill>
+                            <a:srgbClr val="16202B"/>
+                          </a:solidFill>
+                          <a:latin typeface="Microsoft YaHei" pitchFamily="34" charset="0"/>
+                          <a:ea typeface="Microsoft YaHei" pitchFamily="34" charset="-122"/>
+                          <a:cs typeface="Microsoft YaHei" pitchFamily="34" charset="-120"/>
+                        </a:rPr>
+                        <a:t>257.5</a:t>
+                      </a:r>
+                      <a:endParaRPr lang="en-US" sz="1250" dirty="0">
+                        <a:latin typeface="Microsoft YaHei" charset="0"/>
+                        <a:ea typeface="Microsoft YaHei" charset="0"/>
+                        <a:cs typeface="Microsoft YaHei" charset="0"/>
+                      </a:endParaRPr>
+                    </a:p>
+                  </a:txBody>
+                  <a:tcPr marL="91440" marR="91440" marT="45720" marB="45720" anchor="ctr">
+                    <a:lnL w="6350" cap="flat" cmpd="sng" algn="ctr">
+                      <a:solidFill>
+                        <a:srgbClr val="D3DBE3"/>
+                      </a:solidFill>
+                      <a:prstDash val="solid"/>
+                      <a:round/>
+                      <a:headEnd type="none" w="med" len="med"/>
+                      <a:tailEnd type="none" w="med" len="med"/>
+                    </a:lnL>
+                    <a:lnR w="6350" cap="flat" cmpd="sng" algn="ctr">
+                      <a:solidFill>
+                        <a:srgbClr val="D3DBE3"/>
+                      </a:solidFill>
+                      <a:prstDash val="solid"/>
+                      <a:round/>
+                      <a:headEnd type="none" w="med" len="med"/>
+                      <a:tailEnd type="none" w="med" len="med"/>
+                    </a:lnR>
+                    <a:lnT w="6350" cap="flat" cmpd="sng" algn="ctr">
+                      <a:solidFill>
+                        <a:srgbClr val="D3DBE3"/>
+                      </a:solidFill>
+                      <a:prstDash val="solid"/>
+                      <a:round/>
+                      <a:headEnd type="none" w="med" len="med"/>
+                      <a:tailEnd type="none" w="med" len="med"/>
+                    </a:lnT>
+                    <a:lnB w="6350" cap="flat" cmpd="sng" algn="ctr">
+                      <a:solidFill>
+                        <a:srgbClr val="D3DBE3"/>
+                      </a:solidFill>
+                      <a:prstDash val="solid"/>
+                      <a:round/>
+                      <a:headEnd type="none" w="med" len="med"/>
+                      <a:tailEnd type="none" w="med" len="med"/>
+                    </a:lnB>
+                    <a:solidFill>
+                      <a:srgbClr val="FFFFFF"/>
+                    </a:solidFill>
+                  </a:tcPr>
+                </a:tc>
+                <a:tc>
+                  <a:txBody>
+                    <a:bodyPr/>
+                    <a:lstStyle/>
+                    <a:p>
+                      <a:pPr algn="ctr" indent="0" marL="0">
+                        <a:buNone/>
+                      </a:pPr>
+                      <a:r>
+                        <a:rPr lang="en-US" sz="1250" b="1" dirty="0">
+                          <a:solidFill>
+                            <a:srgbClr val="16202B"/>
+                          </a:solidFill>
+                          <a:latin typeface="Microsoft YaHei" pitchFamily="34" charset="0"/>
+                          <a:ea typeface="Microsoft YaHei" pitchFamily="34" charset="-122"/>
+                          <a:cs typeface="Microsoft YaHei" pitchFamily="34" charset="-120"/>
+                        </a:rPr>
+                        <a:t>244</a:t>
+                      </a:r>
+                      <a:endParaRPr lang="en-US" sz="1250" dirty="0">
+                        <a:latin typeface="Microsoft YaHei" charset="0"/>
+                        <a:ea typeface="Microsoft YaHei" charset="0"/>
+                        <a:cs typeface="Microsoft YaHei" charset="0"/>
+                      </a:endParaRPr>
+                    </a:p>
+                  </a:txBody>
+                  <a:tcPr marL="91440" marR="91440" marT="45720" marB="45720" anchor="ctr">
+                    <a:lnL w="6350" cap="flat" cmpd="sng" algn="ctr">
+                      <a:solidFill>
+                        <a:srgbClr val="D3DBE3"/>
+                      </a:solidFill>
+                      <a:prstDash val="solid"/>
+                      <a:round/>
+                      <a:headEnd type="none" w="med" len="med"/>
+                      <a:tailEnd type="none" w="med" len="med"/>
+                    </a:lnL>
+                    <a:lnR w="6350" cap="flat" cmpd="sng" algn="ctr">
+                      <a:solidFill>
+                        <a:srgbClr val="D3DBE3"/>
+                      </a:solidFill>
+                      <a:prstDash val="solid"/>
+                      <a:round/>
+                      <a:headEnd type="none" w="med" len="med"/>
+                      <a:tailEnd type="none" w="med" len="med"/>
+                    </a:lnR>
+                    <a:lnT w="6350" cap="flat" cmpd="sng" algn="ctr">
+                      <a:solidFill>
+                        <a:srgbClr val="D3DBE3"/>
+                      </a:solidFill>
+                      <a:prstDash val="solid"/>
+                      <a:round/>
+                      <a:headEnd type="none" w="med" len="med"/>
+                      <a:tailEnd type="none" w="med" len="med"/>
+                    </a:lnT>
+                    <a:lnB w="6350" cap="flat" cmpd="sng" algn="ctr">
+                      <a:solidFill>
+                        <a:srgbClr val="D3DBE3"/>
+                      </a:solidFill>
+                      <a:prstDash val="solid"/>
+                      <a:round/>
+                      <a:headEnd type="none" w="med" len="med"/>
+                      <a:tailEnd type="none" w="med" len="med"/>
+                    </a:lnB>
+                    <a:solidFill>
+                      <a:srgbClr val="FFFFFF"/>
+                    </a:solidFill>
+                  </a:tcPr>
+                </a:tc>
+              </a:tr>
+              <a:tr h="384048">
+                <a:tc>
+                  <a:txBody>
+                    <a:bodyPr/>
+                    <a:lstStyle/>
+                    <a:p>
+                      <a:pPr algn="l" indent="0" marL="0">
+                        <a:buNone/>
+                      </a:pPr>
+                      <a:r>
+                        <a:rPr lang="en-US" sz="1250" dirty="0">
+                          <a:solidFill>
+                            <a:srgbClr val="16202B"/>
+                          </a:solidFill>
+                          <a:latin typeface="Microsoft YaHei" pitchFamily="34" charset="0"/>
+                          <a:ea typeface="Microsoft YaHei" pitchFamily="34" charset="-122"/>
+                          <a:cs typeface="Microsoft YaHei" pitchFamily="34" charset="-120"/>
+                        </a:rPr>
+                        <a:t>Helal'09  注入锁定倍频器  3.2 GHz  ×64</a:t>
+                      </a:r>
+                      <a:endParaRPr lang="en-US" sz="1250" dirty="0">
+                        <a:latin typeface="Microsoft YaHei" charset="0"/>
+                        <a:ea typeface="Microsoft YaHei" charset="0"/>
+                        <a:cs typeface="Microsoft YaHei" charset="0"/>
+                      </a:endParaRPr>
+                    </a:p>
+                  </a:txBody>
+                  <a:tcPr marL="91440" marR="91440" marT="45720" marB="45720" anchor="ctr">
+                    <a:lnL w="6350" cap="flat" cmpd="sng" algn="ctr">
+                      <a:solidFill>
+                        <a:srgbClr val="D3DBE3"/>
+                      </a:solidFill>
+                      <a:prstDash val="solid"/>
+                      <a:round/>
+                      <a:headEnd type="none" w="med" len="med"/>
+                      <a:tailEnd type="none" w="med" len="med"/>
+                    </a:lnL>
+                    <a:lnR w="6350" cap="flat" cmpd="sng" algn="ctr">
+                      <a:solidFill>
+                        <a:srgbClr val="D3DBE3"/>
+                      </a:solidFill>
+                      <a:prstDash val="solid"/>
+                      <a:round/>
+                      <a:headEnd type="none" w="med" len="med"/>
+                      <a:tailEnd type="none" w="med" len="med"/>
+                    </a:lnR>
+                    <a:lnT w="6350" cap="flat" cmpd="sng" algn="ctr">
+                      <a:solidFill>
+                        <a:srgbClr val="D3DBE3"/>
+                      </a:solidFill>
+                      <a:prstDash val="solid"/>
+                      <a:round/>
+                      <a:headEnd type="none" w="med" len="med"/>
+                      <a:tailEnd type="none" w="med" len="med"/>
+                    </a:lnT>
+                    <a:lnB w="6350" cap="flat" cmpd="sng" algn="ctr">
+                      <a:solidFill>
+                        <a:srgbClr val="D3DBE3"/>
+                      </a:solidFill>
+                      <a:prstDash val="solid"/>
+                      <a:round/>
+                      <a:headEnd type="none" w="med" len="med"/>
+                      <a:tailEnd type="none" w="med" len="med"/>
+                    </a:lnB>
+                    <a:solidFill>
+                      <a:srgbClr val="E8EDF2"/>
+                    </a:solidFill>
+                  </a:tcPr>
+                </a:tc>
+                <a:tc>
+                  <a:txBody>
+                    <a:bodyPr/>
+                    <a:lstStyle/>
+                    <a:p>
+                      <a:pPr algn="ctr" indent="0" marL="0">
+                        <a:buNone/>
+                      </a:pPr>
+                      <a:r>
+                        <a:rPr lang="en-US" sz="1250" dirty="0">
+                          <a:solidFill>
+                            <a:srgbClr val="16202B"/>
+                          </a:solidFill>
+                          <a:latin typeface="Microsoft YaHei" pitchFamily="34" charset="0"/>
+                          <a:ea typeface="Microsoft YaHei" pitchFamily="34" charset="-122"/>
+                          <a:cs typeface="Microsoft YaHei" pitchFamily="34" charset="-120"/>
+                        </a:rPr>
+                        <a:t>130</a:t>
+                      </a:r>
+                      <a:endParaRPr lang="en-US" sz="1250" dirty="0">
+                        <a:latin typeface="Microsoft YaHei" charset="0"/>
+                        <a:ea typeface="Microsoft YaHei" charset="0"/>
+                        <a:cs typeface="Microsoft YaHei" charset="0"/>
+                      </a:endParaRPr>
+                    </a:p>
+                  </a:txBody>
+                  <a:tcPr marL="91440" marR="91440" marT="45720" marB="45720" anchor="ctr">
+                    <a:lnL w="6350" cap="flat" cmpd="sng" algn="ctr">
+                      <a:solidFill>
+                        <a:srgbClr val="D3DBE3"/>
+                      </a:solidFill>
+                      <a:prstDash val="solid"/>
+                      <a:round/>
+                      <a:headEnd type="none" w="med" len="med"/>
+                      <a:tailEnd type="none" w="med" len="med"/>
+                    </a:lnL>
+                    <a:lnR w="6350" cap="flat" cmpd="sng" algn="ctr">
+                      <a:solidFill>
+                        <a:srgbClr val="D3DBE3"/>
+                      </a:solidFill>
+                      <a:prstDash val="solid"/>
+                      <a:round/>
+                      <a:headEnd type="none" w="med" len="med"/>
+                      <a:tailEnd type="none" w="med" len="med"/>
+                    </a:lnR>
+                    <a:lnT w="6350" cap="flat" cmpd="sng" algn="ctr">
+                      <a:solidFill>
+                        <a:srgbClr val="D3DBE3"/>
+                      </a:solidFill>
+                      <a:prstDash val="solid"/>
+                      <a:round/>
+                      <a:headEnd type="none" w="med" len="med"/>
+                      <a:tailEnd type="none" w="med" len="med"/>
+                    </a:lnT>
+                    <a:lnB w="6350" cap="flat" cmpd="sng" algn="ctr">
+                      <a:solidFill>
+                        <a:srgbClr val="D3DBE3"/>
+                      </a:solidFill>
+                      <a:prstDash val="solid"/>
+                      <a:round/>
+                      <a:headEnd type="none" w="med" len="med"/>
+                      <a:tailEnd type="none" w="med" len="med"/>
+                    </a:lnB>
+                    <a:solidFill>
+                      <a:srgbClr val="E8EDF2"/>
+                    </a:solidFill>
+                  </a:tcPr>
+                </a:tc>
+                <a:tc>
+                  <a:txBody>
+                    <a:bodyPr/>
+                    <a:lstStyle/>
+                    <a:p>
+                      <a:pPr algn="ctr" indent="0" marL="0">
+                        <a:buNone/>
+                      </a:pPr>
+                      <a:r>
+                        <a:rPr lang="en-US" sz="1250" dirty="0">
+                          <a:solidFill>
+                            <a:srgbClr val="16202B"/>
+                          </a:solidFill>
+                          <a:latin typeface="Microsoft YaHei" pitchFamily="34" charset="0"/>
+                          <a:ea typeface="Microsoft YaHei" pitchFamily="34" charset="-122"/>
+                          <a:cs typeface="Microsoft YaHei" pitchFamily="34" charset="-120"/>
+                        </a:rPr>
+                        <a:t>83</a:t>
+                      </a:r>
+                      <a:endParaRPr lang="en-US" sz="1250" dirty="0">
+                        <a:latin typeface="Microsoft YaHei" charset="0"/>
+                        <a:ea typeface="Microsoft YaHei" charset="0"/>
+                        <a:cs typeface="Microsoft YaHei" charset="0"/>
+                      </a:endParaRPr>
+                    </a:p>
+                  </a:txBody>
+                  <a:tcPr marL="91440" marR="91440" marT="45720" marB="45720" anchor="ctr">
+                    <a:lnL w="6350" cap="flat" cmpd="sng" algn="ctr">
+                      <a:solidFill>
+                        <a:srgbClr val="D3DBE3"/>
+                      </a:solidFill>
+                      <a:prstDash val="solid"/>
+                      <a:round/>
+                      <a:headEnd type="none" w="med" len="med"/>
+                      <a:tailEnd type="none" w="med" len="med"/>
+                    </a:lnL>
+                    <a:lnR w="6350" cap="flat" cmpd="sng" algn="ctr">
+                      <a:solidFill>
+                        <a:srgbClr val="D3DBE3"/>
+                      </a:solidFill>
+                      <a:prstDash val="solid"/>
+                      <a:round/>
+                      <a:headEnd type="none" w="med" len="med"/>
+                      <a:tailEnd type="none" w="med" len="med"/>
+                    </a:lnR>
+                    <a:lnT w="6350" cap="flat" cmpd="sng" algn="ctr">
+                      <a:solidFill>
+                        <a:srgbClr val="D3DBE3"/>
+                      </a:solidFill>
+                      <a:prstDash val="solid"/>
+                      <a:round/>
+                      <a:headEnd type="none" w="med" len="med"/>
+                      <a:tailEnd type="none" w="med" len="med"/>
+                    </a:lnT>
+                    <a:lnB w="6350" cap="flat" cmpd="sng" algn="ctr">
+                      <a:solidFill>
+                        <a:srgbClr val="D3DBE3"/>
+                      </a:solidFill>
+                      <a:prstDash val="solid"/>
+                      <a:round/>
+                      <a:headEnd type="none" w="med" len="med"/>
+                      <a:tailEnd type="none" w="med" len="med"/>
+                    </a:lnB>
+                    <a:solidFill>
+                      <a:srgbClr val="E8EDF2"/>
+                    </a:solidFill>
+                  </a:tcPr>
+                </a:tc>
+                <a:tc>
+                  <a:txBody>
+                    <a:bodyPr/>
+                    <a:lstStyle/>
+                    <a:p>
+                      <a:pPr algn="ctr" indent="0" marL="0">
+                        <a:buNone/>
+                      </a:pPr>
+                      <a:r>
+                        <a:rPr lang="en-US" sz="1250" b="1" dirty="0">
+                          <a:solidFill>
+                            <a:srgbClr val="16202B"/>
+                          </a:solidFill>
+                          <a:latin typeface="Microsoft YaHei" pitchFamily="34" charset="0"/>
+                          <a:ea typeface="Microsoft YaHei" pitchFamily="34" charset="-122"/>
+                          <a:cs typeface="Microsoft YaHei" pitchFamily="34" charset="-120"/>
+                        </a:rPr>
+                        <a:t>130</a:t>
+                      </a:r>
+                      <a:endParaRPr lang="en-US" sz="1250" dirty="0">
+                        <a:latin typeface="Microsoft YaHei" charset="0"/>
+                        <a:ea typeface="Microsoft YaHei" charset="0"/>
+                        <a:cs typeface="Microsoft YaHei" charset="0"/>
+                      </a:endParaRPr>
+                    </a:p>
+                  </a:txBody>
+                  <a:tcPr marL="91440" marR="91440" marT="45720" marB="45720" anchor="ctr">
+                    <a:lnL w="6350" cap="flat" cmpd="sng" algn="ctr">
+                      <a:solidFill>
+                        <a:srgbClr val="D3DBE3"/>
+                      </a:solidFill>
+                      <a:prstDash val="solid"/>
+                      <a:round/>
+                      <a:headEnd type="none" w="med" len="med"/>
+                      <a:tailEnd type="none" w="med" len="med"/>
+                    </a:lnL>
+                    <a:lnR w="6350" cap="flat" cmpd="sng" algn="ctr">
+                      <a:solidFill>
+                        <a:srgbClr val="D3DBE3"/>
+                      </a:solidFill>
+                      <a:prstDash val="solid"/>
+                      <a:round/>
+                      <a:headEnd type="none" w="med" len="med"/>
+                      <a:tailEnd type="none" w="med" len="med"/>
+                    </a:lnR>
+                    <a:lnT w="6350" cap="flat" cmpd="sng" algn="ctr">
+                      <a:solidFill>
+                        <a:srgbClr val="D3DBE3"/>
+                      </a:solidFill>
+                      <a:prstDash val="solid"/>
+                      <a:round/>
+                      <a:headEnd type="none" w="med" len="med"/>
+                      <a:tailEnd type="none" w="med" len="med"/>
+                    </a:lnT>
+                    <a:lnB w="6350" cap="flat" cmpd="sng" algn="ctr">
+                      <a:solidFill>
+                        <a:srgbClr val="D3DBE3"/>
+                      </a:solidFill>
+                      <a:prstDash val="solid"/>
+                      <a:round/>
+                      <a:headEnd type="none" w="med" len="med"/>
+                      <a:tailEnd type="none" w="med" len="med"/>
+                    </a:lnB>
+                    <a:solidFill>
+                      <a:srgbClr val="E8EDF2"/>
+                    </a:solidFill>
+                  </a:tcPr>
+                </a:tc>
+              </a:tr>
+              <a:tr h="384048">
+                <a:tc>
+                  <a:txBody>
+                    <a:bodyPr/>
+                    <a:lstStyle/>
+                    <a:p>
+                      <a:pPr algn="l" indent="0" marL="0">
+                        <a:buNone/>
+                      </a:pPr>
+                      <a:r>
+                        <a:rPr lang="en-US" sz="1250" dirty="0">
+                          <a:solidFill>
+                            <a:srgbClr val="16202B"/>
+                          </a:solidFill>
+                          <a:latin typeface="Microsoft YaHei" pitchFamily="34" charset="0"/>
+                          <a:ea typeface="Microsoft YaHei" pitchFamily="34" charset="-122"/>
+                          <a:cs typeface="Microsoft YaHei" pitchFamily="34" charset="-120"/>
+                        </a:rPr>
+                        <a:t>Elshazly'13  数字 MDLL  1.5 GHz  ×4</a:t>
+                      </a:r>
+                      <a:endParaRPr lang="en-US" sz="1250" dirty="0">
+                        <a:latin typeface="Microsoft YaHei" charset="0"/>
+                        <a:ea typeface="Microsoft YaHei" charset="0"/>
+                        <a:cs typeface="Microsoft YaHei" charset="0"/>
+                      </a:endParaRPr>
+                    </a:p>
+                  </a:txBody>
+                  <a:tcPr marL="91440" marR="91440" marT="45720" marB="45720" anchor="ctr">
+                    <a:lnL w="6350" cap="flat" cmpd="sng" algn="ctr">
+                      <a:solidFill>
+                        <a:srgbClr val="D3DBE3"/>
+                      </a:solidFill>
+                      <a:prstDash val="solid"/>
+                      <a:round/>
+                      <a:headEnd type="none" w="med" len="med"/>
+                      <a:tailEnd type="none" w="med" len="med"/>
+                    </a:lnL>
+                    <a:lnR w="6350" cap="flat" cmpd="sng" algn="ctr">
+                      <a:solidFill>
+                        <a:srgbClr val="D3DBE3"/>
+                      </a:solidFill>
+                      <a:prstDash val="solid"/>
+                      <a:round/>
+                      <a:headEnd type="none" w="med" len="med"/>
+                      <a:tailEnd type="none" w="med" len="med"/>
+                    </a:lnR>
+                    <a:lnT w="6350" cap="flat" cmpd="sng" algn="ctr">
+                      <a:solidFill>
+                        <a:srgbClr val="D3DBE3"/>
+                      </a:solidFill>
+                      <a:prstDash val="solid"/>
+                      <a:round/>
+                      <a:headEnd type="none" w="med" len="med"/>
+                      <a:tailEnd type="none" w="med" len="med"/>
+                    </a:lnT>
+                    <a:lnB w="6350" cap="flat" cmpd="sng" algn="ctr">
+                      <a:solidFill>
+                        <a:srgbClr val="D3DBE3"/>
+                      </a:solidFill>
+                      <a:prstDash val="solid"/>
+                      <a:round/>
+                      <a:headEnd type="none" w="med" len="med"/>
+                      <a:tailEnd type="none" w="med" len="med"/>
+                    </a:lnB>
+                    <a:solidFill>
+                      <a:srgbClr val="FFFFFF"/>
+                    </a:solidFill>
+                  </a:tcPr>
+                </a:tc>
+                <a:tc>
+                  <a:txBody>
+                    <a:bodyPr/>
+                    <a:lstStyle/>
+                    <a:p>
+                      <a:pPr algn="ctr" indent="0" marL="0">
+                        <a:buNone/>
+                      </a:pPr>
+                      <a:r>
+                        <a:rPr lang="en-US" sz="1250" dirty="0">
+                          <a:solidFill>
+                            <a:srgbClr val="16202B"/>
+                          </a:solidFill>
+                          <a:latin typeface="Microsoft YaHei" pitchFamily="34" charset="0"/>
+                          <a:ea typeface="Microsoft YaHei" pitchFamily="34" charset="-122"/>
+                          <a:cs typeface="Microsoft YaHei" pitchFamily="34" charset="-120"/>
+                        </a:rPr>
+                        <a:t>400</a:t>
+                      </a:r>
+                      <a:endParaRPr lang="en-US" sz="1250" dirty="0">
+                        <a:latin typeface="Microsoft YaHei" charset="0"/>
+                        <a:ea typeface="Microsoft YaHei" charset="0"/>
+                        <a:cs typeface="Microsoft YaHei" charset="0"/>
+                      </a:endParaRPr>
+                    </a:p>
+                  </a:txBody>
+                  <a:tcPr marL="91440" marR="91440" marT="45720" marB="45720" anchor="ctr">
+                    <a:lnL w="6350" cap="flat" cmpd="sng" algn="ctr">
+                      <a:solidFill>
+                        <a:srgbClr val="D3DBE3"/>
+                      </a:solidFill>
+                      <a:prstDash val="solid"/>
+                      <a:round/>
+                      <a:headEnd type="none" w="med" len="med"/>
+                      <a:tailEnd type="none" w="med" len="med"/>
+                    </a:lnL>
+                    <a:lnR w="6350" cap="flat" cmpd="sng" algn="ctr">
+                      <a:solidFill>
+                        <a:srgbClr val="D3DBE3"/>
+                      </a:solidFill>
+                      <a:prstDash val="solid"/>
+                      <a:round/>
+                      <a:headEnd type="none" w="med" len="med"/>
+                      <a:tailEnd type="none" w="med" len="med"/>
+                    </a:lnR>
+                    <a:lnT w="6350" cap="flat" cmpd="sng" algn="ctr">
+                      <a:solidFill>
+                        <a:srgbClr val="D3DBE3"/>
+                      </a:solidFill>
+                      <a:prstDash val="solid"/>
+                      <a:round/>
+                      <a:headEnd type="none" w="med" len="med"/>
+                      <a:tailEnd type="none" w="med" len="med"/>
+                    </a:lnT>
+                    <a:lnB w="6350" cap="flat" cmpd="sng" algn="ctr">
+                      <a:solidFill>
+                        <a:srgbClr val="D3DBE3"/>
+                      </a:solidFill>
+                      <a:prstDash val="solid"/>
+                      <a:round/>
+                      <a:headEnd type="none" w="med" len="med"/>
+                      <a:tailEnd type="none" w="med" len="med"/>
+                    </a:lnB>
+                    <a:solidFill>
+                      <a:srgbClr val="FFFFFF"/>
+                    </a:solidFill>
+                  </a:tcPr>
+                </a:tc>
+                <a:tc>
+                  <a:txBody>
+                    <a:bodyPr/>
+                    <a:lstStyle/>
+                    <a:p>
+                      <a:pPr algn="ctr" indent="0" marL="0">
+                        <a:buNone/>
+                      </a:pPr>
+                      <a:r>
+                        <a:rPr lang="en-US" sz="1250" dirty="0">
+                          <a:solidFill>
+                            <a:srgbClr val="16202B"/>
+                          </a:solidFill>
+                          <a:latin typeface="Microsoft YaHei" pitchFamily="34" charset="0"/>
+                          <a:ea typeface="Microsoft YaHei" pitchFamily="34" charset="-122"/>
+                          <a:cs typeface="Microsoft YaHei" pitchFamily="34" charset="-120"/>
+                        </a:rPr>
+                        <a:t>541.4</a:t>
+                      </a:r>
+                      <a:endParaRPr lang="en-US" sz="1250" dirty="0">
+                        <a:latin typeface="Microsoft YaHei" charset="0"/>
+                        <a:ea typeface="Microsoft YaHei" charset="0"/>
+                        <a:cs typeface="Microsoft YaHei" charset="0"/>
+                      </a:endParaRPr>
+                    </a:p>
+                  </a:txBody>
+                  <a:tcPr marL="91440" marR="91440" marT="45720" marB="45720" anchor="ctr">
+                    <a:lnL w="6350" cap="flat" cmpd="sng" algn="ctr">
+                      <a:solidFill>
+                        <a:srgbClr val="D3DBE3"/>
+                      </a:solidFill>
+                      <a:prstDash val="solid"/>
+                      <a:round/>
+                      <a:headEnd type="none" w="med" len="med"/>
+                      <a:tailEnd type="none" w="med" len="med"/>
+                    </a:lnL>
+                    <a:lnR w="6350" cap="flat" cmpd="sng" algn="ctr">
+                      <a:solidFill>
+                        <a:srgbClr val="D3DBE3"/>
+                      </a:solidFill>
+                      <a:prstDash val="solid"/>
+                      <a:round/>
+                      <a:headEnd type="none" w="med" len="med"/>
+                      <a:tailEnd type="none" w="med" len="med"/>
+                    </a:lnR>
+                    <a:lnT w="6350" cap="flat" cmpd="sng" algn="ctr">
+                      <a:solidFill>
+                        <a:srgbClr val="D3DBE3"/>
+                      </a:solidFill>
+                      <a:prstDash val="solid"/>
+                      <a:round/>
+                      <a:headEnd type="none" w="med" len="med"/>
+                      <a:tailEnd type="none" w="med" len="med"/>
+                    </a:lnT>
+                    <a:lnB w="6350" cap="flat" cmpd="sng" algn="ctr">
+                      <a:solidFill>
+                        <a:srgbClr val="D3DBE3"/>
+                      </a:solidFill>
+                      <a:prstDash val="solid"/>
+                      <a:round/>
+                      <a:headEnd type="none" w="med" len="med"/>
+                      <a:tailEnd type="none" w="med" len="med"/>
+                    </a:lnB>
+                    <a:solidFill>
+                      <a:srgbClr val="FFFFFF"/>
+                    </a:solidFill>
+                  </a:tcPr>
+                </a:tc>
+                <a:tc>
+                  <a:txBody>
+                    <a:bodyPr/>
+                    <a:lstStyle/>
+                    <a:p>
+                      <a:pPr algn="ctr" indent="0" marL="0">
+                        <a:buNone/>
+                      </a:pPr>
+                      <a:r>
+                        <a:rPr lang="en-US" sz="1250" b="1" dirty="0">
+                          <a:solidFill>
+                            <a:srgbClr val="16202B"/>
+                          </a:solidFill>
+                          <a:latin typeface="Microsoft YaHei" pitchFamily="34" charset="0"/>
+                          <a:ea typeface="Microsoft YaHei" pitchFamily="34" charset="-122"/>
+                          <a:cs typeface="Microsoft YaHei" pitchFamily="34" charset="-120"/>
+                        </a:rPr>
+                        <a:t>415</a:t>
+                      </a:r>
+                      <a:endParaRPr lang="en-US" sz="1250" dirty="0">
+                        <a:latin typeface="Microsoft YaHei" charset="0"/>
+                        <a:ea typeface="Microsoft YaHei" charset="0"/>
+                        <a:cs typeface="Microsoft YaHei" charset="0"/>
+                      </a:endParaRPr>
+                    </a:p>
+                  </a:txBody>
+                  <a:tcPr marL="91440" marR="91440" marT="45720" marB="45720" anchor="ctr">
+                    <a:lnL w="6350" cap="flat" cmpd="sng" algn="ctr">
+                      <a:solidFill>
+                        <a:srgbClr val="D3DBE3"/>
+                      </a:solidFill>
+                      <a:prstDash val="solid"/>
+                      <a:round/>
+                      <a:headEnd type="none" w="med" len="med"/>
+                      <a:tailEnd type="none" w="med" len="med"/>
+                    </a:lnL>
+                    <a:lnR w="6350" cap="flat" cmpd="sng" algn="ctr">
+                      <a:solidFill>
+                        <a:srgbClr val="D3DBE3"/>
+                      </a:solidFill>
+                      <a:prstDash val="solid"/>
+                      <a:round/>
+                      <a:headEnd type="none" w="med" len="med"/>
+                      <a:tailEnd type="none" w="med" len="med"/>
+                    </a:lnR>
+                    <a:lnT w="6350" cap="flat" cmpd="sng" algn="ctr">
+                      <a:solidFill>
+                        <a:srgbClr val="D3DBE3"/>
+                      </a:solidFill>
+                      <a:prstDash val="solid"/>
+                      <a:round/>
+                      <a:headEnd type="none" w="med" len="med"/>
+                      <a:tailEnd type="none" w="med" len="med"/>
+                    </a:lnT>
+                    <a:lnB w="6350" cap="flat" cmpd="sng" algn="ctr">
+                      <a:solidFill>
+                        <a:srgbClr val="D3DBE3"/>
+                      </a:solidFill>
+                      <a:prstDash val="solid"/>
+                      <a:round/>
+                      <a:headEnd type="none" w="med" len="med"/>
+                      <a:tailEnd type="none" w="med" len="med"/>
+                    </a:lnB>
+                    <a:solidFill>
+                      <a:srgbClr val="FFFFFF"/>
+                    </a:solidFill>
+                  </a:tcPr>
+                </a:tc>
+              </a:tr>
             </a:tbl>
           </a:graphicData>
         </a:graphic>
@@ -7229,7 +8051,7 @@
                 <a:ea typeface="Microsoft YaHei" pitchFamily="34" charset="-122"/>
                 <a:cs typeface="Microsoft YaHei" pitchFamily="34" charset="-120"/>
               </a:rPr>
-              <a:t>779 项自动化测试，每次代码提交在两个 Python 版本上全量运行</a:t>
+              <a:t>883 项自动化测试，每次代码提交在两个 Python 版本上全量运行</a:t>
             </a:r>
             <a:endParaRPr lang="en-US" sz="1400" dirty="0"/>
           </a:p>

--- a/docs/reports/pllsim-项目总结-v0.9.3.pptx
+++ b/docs/reports/pllsim-项目总结-v0.9.3.pptx
@@ -1708,7 +1708,7 @@
                 <a:ea typeface="Microsoft YaHei" pitchFamily="34" charset="-122"/>
                 <a:cs typeface="Microsoft YaHei" pitchFamily="34" charset="-120"/>
               </a:rPr>
-              <a:t>v0.9.3    ·    6 种架构    ·    883 项自动化测试</a:t>
+              <a:t>v0.9.3    ·    6 种架构    ·    944 项自动化测试</a:t>
             </a:r>
             <a:endParaRPr lang="en-US" sz="1400" dirty="0"/>
           </a:p>
@@ -2737,7 +2737,7 @@
                 <a:ea typeface="Microsoft YaHei" pitchFamily="34" charset="-122"/>
                 <a:cs typeface="Microsoft YaHei" pitchFamily="34" charset="-120"/>
               </a:rPr>
-              <a:t>883</a:t>
+              <a:t>944</a:t>
             </a:r>
             <a:endParaRPr lang="en-US" sz="3400" dirty="0"/>
           </a:p>
@@ -8051,7 +8051,7 @@
                 <a:ea typeface="Microsoft YaHei" pitchFamily="34" charset="-122"/>
                 <a:cs typeface="Microsoft YaHei" pitchFamily="34" charset="-120"/>
               </a:rPr>
-              <a:t>883 项自动化测试，每次代码提交在两个 Python 版本上全量运行</a:t>
+              <a:t>944 项自动化测试，每次代码提交在两个 Python 版本上全量运行</a:t>
             </a:r>
             <a:endParaRPr lang="en-US" sz="1400" dirty="0"/>
           </a:p>
